--- a/documents/Project_Ppt.pptx
+++ b/documents/Project_Ppt.pptx
@@ -11275,6 +11275,100 @@
           </a:p>
         </p:txBody>
       </p:sp>
+      <p:sp>
+        <p:nvSpPr>
+          <p:cNvPr id="5" name="TextBox 4">
+            <a:extLst>
+              <a:ext uri="{FF2B5EF4-FFF2-40B4-BE49-F238E27FC236}">
+                <a16:creationId xmlns:a16="http://schemas.microsoft.com/office/drawing/2014/main" id="{B0990F3F-5FB8-D6EC-4ABC-17BDFFEF89CD}"/>
+              </a:ext>
+            </a:extLst>
+          </p:cNvPr>
+          <p:cNvSpPr txBox="1"/>
+          <p:nvPr/>
+        </p:nvSpPr>
+        <p:spPr>
+          <a:xfrm>
+            <a:off x="4429433" y="6399312"/>
+            <a:ext cx="4572000" cy="307777"/>
+          </a:xfrm>
+          <a:prstGeom prst="rect">
+            <a:avLst/>
+          </a:prstGeom>
+          <a:noFill/>
+        </p:spPr>
+        <p:txBody>
+          <a:bodyPr wrap="square">
+            <a:spAutoFit/>
+          </a:bodyPr>
+          <a:lstStyle/>
+          <a:p>
+            <a:pPr marL="0" marR="0" lvl="0" indent="0" algn="r" rtl="0">
+              <a:lnSpc>
+                <a:spcPct val="100000"/>
+              </a:lnSpc>
+              <a:spcBef>
+                <a:spcPts val="0"/>
+              </a:spcBef>
+              <a:spcAft>
+                <a:spcPts val="0"/>
+              </a:spcAft>
+              <a:buNone/>
+            </a:pPr>
+            <a:r>
+              <a:rPr lang="en-US" b="1" i="0" u="none" strike="noStrike" cap="none" dirty="0">
+                <a:solidFill>
+                  <a:schemeClr val="dk1"/>
+                </a:solidFill>
+                <a:latin typeface="Calibri"/>
+                <a:ea typeface="Calibri"/>
+                <a:cs typeface="Calibri"/>
+                <a:sym typeface="Calibri"/>
+              </a:rPr>
+              <a:t>8</a:t>
+            </a:r>
+            <a:endParaRPr lang="en-US" sz="1400" b="0" i="0" u="none" strike="noStrike" cap="none" dirty="0">
+              <a:solidFill>
+                <a:schemeClr val="dk1"/>
+              </a:solidFill>
+              <a:latin typeface="Times New Roman"/>
+              <a:ea typeface="Times New Roman"/>
+              <a:cs typeface="Times New Roman"/>
+              <a:sym typeface="Times New Roman"/>
+            </a:endParaRPr>
+          </a:p>
+        </p:txBody>
+      </p:sp>
+      <p:pic>
+        <p:nvPicPr>
+          <p:cNvPr id="6" name="Picture 5" descr="Key features - Free seo and web icons">
+            <a:extLst>
+              <a:ext uri="{FF2B5EF4-FFF2-40B4-BE49-F238E27FC236}">
+                <a16:creationId xmlns:a16="http://schemas.microsoft.com/office/drawing/2014/main" id="{84889BF7-643C-D607-B5C4-DB70BE029F6C}"/>
+              </a:ext>
+            </a:extLst>
+          </p:cNvPr>
+          <p:cNvPicPr>
+            <a:picLocks noChangeAspect="1"/>
+          </p:cNvPicPr>
+          <p:nvPr/>
+        </p:nvPicPr>
+        <p:blipFill>
+          <a:blip r:embed="rId2"/>
+          <a:stretch>
+            <a:fillRect/>
+          </a:stretch>
+        </p:blipFill>
+        <p:spPr>
+          <a:xfrm>
+            <a:off x="6858308" y="1076785"/>
+            <a:ext cx="2143125" cy="2143125"/>
+          </a:xfrm>
+          <a:prstGeom prst="rect">
+            <a:avLst/>
+          </a:prstGeom>
+        </p:spPr>
+      </p:pic>
     </p:spTree>
     <p:extLst>
       <p:ext uri="{BB962C8B-B14F-4D97-AF65-F5344CB8AC3E}">
@@ -11471,6 +11565,61 @@
               <a:latin typeface="Times New Roman" panose="02020603050405020304" pitchFamily="18" charset="0"/>
               <a:cs typeface="Times New Roman" panose="02020603050405020304" pitchFamily="18" charset="0"/>
             </a:endParaRPr>
+          </a:p>
+        </p:txBody>
+      </p:sp>
+      <p:sp>
+        <p:nvSpPr>
+          <p:cNvPr id="5" name="TextBox 4">
+            <a:extLst>
+              <a:ext uri="{FF2B5EF4-FFF2-40B4-BE49-F238E27FC236}">
+                <a16:creationId xmlns:a16="http://schemas.microsoft.com/office/drawing/2014/main" id="{616EBB3F-8CEC-1945-487D-B63C4698CDC6}"/>
+              </a:ext>
+            </a:extLst>
+          </p:cNvPr>
+          <p:cNvSpPr txBox="1"/>
+          <p:nvPr/>
+        </p:nvSpPr>
+        <p:spPr>
+          <a:xfrm>
+            <a:off x="4419600" y="6272280"/>
+            <a:ext cx="4572000" cy="307777"/>
+          </a:xfrm>
+          <a:prstGeom prst="rect">
+            <a:avLst/>
+          </a:prstGeom>
+          <a:noFill/>
+        </p:spPr>
+        <p:txBody>
+          <a:bodyPr wrap="square">
+            <a:spAutoFit/>
+          </a:bodyPr>
+          <a:lstStyle/>
+          <a:p>
+            <a:pPr marL="0" marR="0" lvl="0" indent="0" algn="r" rtl="0">
+              <a:lnSpc>
+                <a:spcPct val="100000"/>
+              </a:lnSpc>
+              <a:spcBef>
+                <a:spcPts val="0"/>
+              </a:spcBef>
+              <a:spcAft>
+                <a:spcPts val="0"/>
+              </a:spcAft>
+              <a:buNone/>
+            </a:pPr>
+            <a:r>
+              <a:rPr lang="en-US" b="1" i="0" u="none" strike="noStrike" cap="none" dirty="0">
+                <a:solidFill>
+                  <a:schemeClr val="dk1"/>
+                </a:solidFill>
+                <a:latin typeface="Calibri"/>
+                <a:ea typeface="Calibri"/>
+                <a:cs typeface="Calibri"/>
+                <a:sym typeface="Calibri"/>
+              </a:rPr>
+              <a:t>9</a:t>
+            </a:r>
           </a:p>
         </p:txBody>
       </p:sp>
@@ -11923,19 +12072,16 @@
               </a:spcAft>
               <a:buNone/>
             </a:pPr>
-            <a:fld id="{00000000-1234-1234-1234-123412341234}" type="slidenum">
-              <a:rPr lang="en-US" sz="1200" b="1" i="0" u="none" strike="noStrike" cap="none">
-                <a:solidFill>
-                  <a:srgbClr val="000000"/>
-                </a:solidFill>
+            <a:r>
+              <a:rPr lang="en-US" sz="1200" b="1" dirty="0">
                 <a:latin typeface="Calibri"/>
                 <a:ea typeface="Calibri"/>
                 <a:cs typeface="Calibri"/>
                 <a:sym typeface="Calibri"/>
               </a:rPr>
-              <a:t>3</a:t>
-            </a:fld>
-            <a:endParaRPr sz="1200" b="0" i="0" u="none" strike="noStrike" cap="none">
+              <a:t>1</a:t>
+            </a:r>
+            <a:endParaRPr sz="1200" b="0" i="0" u="none" strike="noStrike" cap="none" dirty="0">
               <a:solidFill>
                 <a:schemeClr val="dk1"/>
               </a:solidFill>
@@ -12237,6 +12383,37 @@
           </a:p>
         </p:txBody>
       </p:sp>
+      <p:pic>
+        <p:nvPicPr>
+          <p:cNvPr id="2" name="Picture 1" descr="Data Science">
+            <a:extLst>
+              <a:ext uri="{FF2B5EF4-FFF2-40B4-BE49-F238E27FC236}">
+                <a16:creationId xmlns:a16="http://schemas.microsoft.com/office/drawing/2014/main" id="{86CC1CD3-7EEA-EFA7-7CAD-A393FB629A1D}"/>
+              </a:ext>
+            </a:extLst>
+          </p:cNvPr>
+          <p:cNvPicPr>
+            <a:picLocks noChangeAspect="1"/>
+          </p:cNvPicPr>
+          <p:nvPr/>
+        </p:nvPicPr>
+        <p:blipFill>
+          <a:blip r:embed="rId3"/>
+          <a:srcRect b="21379"/>
+          <a:stretch>
+            <a:fillRect/>
+          </a:stretch>
+        </p:blipFill>
+        <p:spPr>
+          <a:xfrm>
+            <a:off x="6310072" y="4636599"/>
+            <a:ext cx="2619375" cy="1700874"/>
+          </a:xfrm>
+          <a:prstGeom prst="rect">
+            <a:avLst/>
+          </a:prstGeom>
+        </p:spPr>
+      </p:pic>
     </p:spTree>
   </p:cSld>
   <p:clrMapOvr>
@@ -12348,19 +12525,16 @@
               </a:spcAft>
               <a:buNone/>
             </a:pPr>
-            <a:fld id="{00000000-1234-1234-1234-123412341234}" type="slidenum">
-              <a:rPr lang="en-US" sz="1200" b="1" i="0" u="none" strike="noStrike" cap="none">
-                <a:solidFill>
-                  <a:srgbClr val="000000"/>
-                </a:solidFill>
+            <a:r>
+              <a:rPr lang="en-US" sz="1200" b="1" dirty="0">
                 <a:latin typeface="Calibri"/>
                 <a:ea typeface="Calibri"/>
                 <a:cs typeface="Calibri"/>
                 <a:sym typeface="Calibri"/>
               </a:rPr>
-              <a:t>4</a:t>
-            </a:fld>
-            <a:endParaRPr sz="1200" b="0" i="0" u="none" strike="noStrike" cap="none">
+              <a:t>2</a:t>
+            </a:r>
+            <a:endParaRPr sz="1200" b="0" i="0" u="none" strike="noStrike" cap="none" dirty="0">
               <a:solidFill>
                 <a:schemeClr val="dk1"/>
               </a:solidFill>
@@ -12673,8 +12847,8 @@
         </p:nvSpPr>
         <p:spPr bwMode="auto">
           <a:xfrm>
-            <a:off x="120259" y="1249970"/>
-            <a:ext cx="8903482" cy="3785652"/>
+            <a:off x="90762" y="837600"/>
+            <a:ext cx="8738606" cy="3785652"/>
           </a:xfrm>
           <a:prstGeom prst="rect">
             <a:avLst/>
@@ -12849,6 +13023,7 @@
             </a:r>
           </a:p>
           <a:p>
+            <a:pPr algn="r"/>
             <a:r>
               <a:rPr lang="en-US" sz="2000" b="1" dirty="0">
                 <a:solidFill>
@@ -12861,6 +13036,7 @@
             </a:r>
           </a:p>
           <a:p>
+            <a:pPr algn="r"/>
             <a:endParaRPr lang="en-US" sz="2000" b="1" dirty="0">
               <a:solidFill>
                 <a:srgbClr val="FF0000"/>
@@ -12870,7 +13046,7 @@
             </a:endParaRPr>
           </a:p>
           <a:p>
-            <a:pPr marL="342900" indent="-342900">
+            <a:pPr marL="342900" indent="-342900" algn="r">
               <a:buFont typeface="Arial" panose="020B0604020202020204" pitchFamily="34" charset="0"/>
               <a:buChar char="•"/>
             </a:pPr>
@@ -12887,7 +13063,7 @@
             </a:endParaRPr>
           </a:p>
           <a:p>
-            <a:pPr marL="342900" indent="-342900">
+            <a:pPr marL="342900" indent="-342900" algn="r">
               <a:buFont typeface="Arial" panose="020B0604020202020204" pitchFamily="34" charset="0"/>
               <a:buChar char="•"/>
             </a:pPr>
@@ -12934,6 +13110,36 @@
           </a:p>
         </p:txBody>
       </p:sp>
+      <p:pic>
+        <p:nvPicPr>
+          <p:cNvPr id="5" name="Picture 4">
+            <a:extLst>
+              <a:ext uri="{FF2B5EF4-FFF2-40B4-BE49-F238E27FC236}">
+                <a16:creationId xmlns:a16="http://schemas.microsoft.com/office/drawing/2014/main" id="{F584F448-BB24-EF7B-6FF2-C34C7572760C}"/>
+              </a:ext>
+            </a:extLst>
+          </p:cNvPr>
+          <p:cNvPicPr>
+            <a:picLocks noChangeAspect="1"/>
+          </p:cNvPicPr>
+          <p:nvPr/>
+        </p:nvPicPr>
+        <p:blipFill>
+          <a:blip r:embed="rId3"/>
+          <a:stretch>
+            <a:fillRect/>
+          </a:stretch>
+        </p:blipFill>
+        <p:spPr>
+          <a:xfrm>
+            <a:off x="354769" y="4343889"/>
+            <a:ext cx="2319662" cy="2233925"/>
+          </a:xfrm>
+          <a:prstGeom prst="rect">
+            <a:avLst/>
+          </a:prstGeom>
+        </p:spPr>
+      </p:pic>
     </p:spTree>
   </p:cSld>
   <p:clrMapOvr>
@@ -13011,7 +13217,12 @@
             <p:ph type="body" idx="1"/>
           </p:nvPr>
         </p:nvSpPr>
-        <p:spPr/>
+        <p:spPr>
+          <a:xfrm>
+            <a:off x="369069" y="2994022"/>
+            <a:ext cx="8229240" cy="3977280"/>
+          </a:xfrm>
+        </p:spPr>
         <p:txBody>
           <a:bodyPr>
             <a:normAutofit/>
@@ -13189,6 +13400,101 @@
           </a:p>
         </p:txBody>
       </p:sp>
+      <p:sp>
+        <p:nvSpPr>
+          <p:cNvPr id="6" name="TextBox 5">
+            <a:extLst>
+              <a:ext uri="{FF2B5EF4-FFF2-40B4-BE49-F238E27FC236}">
+                <a16:creationId xmlns:a16="http://schemas.microsoft.com/office/drawing/2014/main" id="{5ABA66E6-A69C-5706-07E1-91EECA37AD4E}"/>
+              </a:ext>
+            </a:extLst>
+          </p:cNvPr>
+          <p:cNvSpPr txBox="1"/>
+          <p:nvPr/>
+        </p:nvSpPr>
+        <p:spPr>
+          <a:xfrm>
+            <a:off x="4311445" y="6272280"/>
+            <a:ext cx="4572000" cy="307777"/>
+          </a:xfrm>
+          <a:prstGeom prst="rect">
+            <a:avLst/>
+          </a:prstGeom>
+          <a:noFill/>
+        </p:spPr>
+        <p:txBody>
+          <a:bodyPr wrap="square">
+            <a:spAutoFit/>
+          </a:bodyPr>
+          <a:lstStyle/>
+          <a:p>
+            <a:pPr marL="0" marR="0" lvl="0" indent="0" algn="r" rtl="0">
+              <a:lnSpc>
+                <a:spcPct val="100000"/>
+              </a:lnSpc>
+              <a:spcBef>
+                <a:spcPts val="0"/>
+              </a:spcBef>
+              <a:spcAft>
+                <a:spcPts val="0"/>
+              </a:spcAft>
+              <a:buNone/>
+            </a:pPr>
+            <a:r>
+              <a:rPr lang="en-US" b="1" i="0" u="none" strike="noStrike" cap="none" dirty="0">
+                <a:solidFill>
+                  <a:schemeClr val="dk1"/>
+                </a:solidFill>
+                <a:latin typeface="Calibri"/>
+                <a:ea typeface="Calibri"/>
+                <a:cs typeface="Calibri"/>
+                <a:sym typeface="Calibri"/>
+              </a:rPr>
+              <a:t>3</a:t>
+            </a:r>
+            <a:endParaRPr lang="en-US" sz="1400" b="0" i="0" u="none" strike="noStrike" cap="none" dirty="0">
+              <a:solidFill>
+                <a:schemeClr val="dk1"/>
+              </a:solidFill>
+              <a:latin typeface="Times New Roman"/>
+              <a:ea typeface="Times New Roman"/>
+              <a:cs typeface="Times New Roman"/>
+              <a:sym typeface="Times New Roman"/>
+            </a:endParaRPr>
+          </a:p>
+        </p:txBody>
+      </p:sp>
+      <p:pic>
+        <p:nvPicPr>
+          <p:cNvPr id="8" name="Picture 7">
+            <a:extLst>
+              <a:ext uri="{FF2B5EF4-FFF2-40B4-BE49-F238E27FC236}">
+                <a16:creationId xmlns:a16="http://schemas.microsoft.com/office/drawing/2014/main" id="{01EC557E-A0CA-5750-8A1D-6863772A5329}"/>
+              </a:ext>
+            </a:extLst>
+          </p:cNvPr>
+          <p:cNvPicPr>
+            <a:picLocks noChangeAspect="1"/>
+          </p:cNvPicPr>
+          <p:nvPr/>
+        </p:nvPicPr>
+        <p:blipFill>
+          <a:blip r:embed="rId2"/>
+          <a:srcRect t="59761"/>
+          <a:stretch>
+            <a:fillRect/>
+          </a:stretch>
+        </p:blipFill>
+        <p:spPr>
+          <a:xfrm>
+            <a:off x="1740669" y="1268361"/>
+            <a:ext cx="5486040" cy="1145557"/>
+          </a:xfrm>
+          <a:prstGeom prst="rect">
+            <a:avLst/>
+          </a:prstGeom>
+        </p:spPr>
+      </p:pic>
     </p:spTree>
     <p:extLst>
       <p:ext uri="{BB962C8B-B14F-4D97-AF65-F5344CB8AC3E}">
@@ -14152,6 +14458,70 @@
           </a:graphicData>
         </a:graphic>
       </p:graphicFrame>
+      <p:sp>
+        <p:nvSpPr>
+          <p:cNvPr id="5" name="TextBox 4">
+            <a:extLst>
+              <a:ext uri="{FF2B5EF4-FFF2-40B4-BE49-F238E27FC236}">
+                <a16:creationId xmlns:a16="http://schemas.microsoft.com/office/drawing/2014/main" id="{B7ECE055-F6A9-ABF6-437F-77064878B14C}"/>
+              </a:ext>
+            </a:extLst>
+          </p:cNvPr>
+          <p:cNvSpPr txBox="1"/>
+          <p:nvPr/>
+        </p:nvSpPr>
+        <p:spPr>
+          <a:xfrm>
+            <a:off x="4352544" y="6390837"/>
+            <a:ext cx="4572000" cy="307777"/>
+          </a:xfrm>
+          <a:prstGeom prst="rect">
+            <a:avLst/>
+          </a:prstGeom>
+          <a:noFill/>
+        </p:spPr>
+        <p:txBody>
+          <a:bodyPr wrap="square">
+            <a:spAutoFit/>
+          </a:bodyPr>
+          <a:lstStyle/>
+          <a:p>
+            <a:pPr marL="0" marR="0" lvl="0" indent="0" algn="r" rtl="0">
+              <a:lnSpc>
+                <a:spcPct val="100000"/>
+              </a:lnSpc>
+              <a:spcBef>
+                <a:spcPts val="0"/>
+              </a:spcBef>
+              <a:spcAft>
+                <a:spcPts val="0"/>
+              </a:spcAft>
+              <a:buNone/>
+            </a:pPr>
+            <a:r>
+              <a:rPr lang="en-US" b="1" i="0" u="none" strike="noStrike" cap="none" dirty="0">
+                <a:solidFill>
+                  <a:schemeClr val="dk1"/>
+                </a:solidFill>
+                <a:latin typeface="Calibri"/>
+                <a:ea typeface="Calibri"/>
+                <a:cs typeface="Calibri"/>
+                <a:sym typeface="Calibri"/>
+              </a:rPr>
+              <a:t>4</a:t>
+            </a:r>
+            <a:endParaRPr lang="en-US" sz="1400" b="0" i="0" u="none" strike="noStrike" cap="none" dirty="0">
+              <a:solidFill>
+                <a:schemeClr val="dk1"/>
+              </a:solidFill>
+              <a:latin typeface="Times New Roman"/>
+              <a:ea typeface="Times New Roman"/>
+              <a:cs typeface="Times New Roman"/>
+              <a:sym typeface="Times New Roman"/>
+            </a:endParaRPr>
+          </a:p>
+        </p:txBody>
+      </p:sp>
     </p:spTree>
     <p:extLst>
       <p:ext uri="{BB962C8B-B14F-4D97-AF65-F5344CB8AC3E}">
@@ -14333,6 +14703,70 @@
             <a:endParaRPr lang="en-IN" sz="2000" dirty="0">
               <a:latin typeface="Times New Roman" panose="02020603050405020304" pitchFamily="18" charset="0"/>
               <a:cs typeface="Times New Roman" panose="02020603050405020304" pitchFamily="18" charset="0"/>
+            </a:endParaRPr>
+          </a:p>
+        </p:txBody>
+      </p:sp>
+      <p:sp>
+        <p:nvSpPr>
+          <p:cNvPr id="5" name="TextBox 4">
+            <a:extLst>
+              <a:ext uri="{FF2B5EF4-FFF2-40B4-BE49-F238E27FC236}">
+                <a16:creationId xmlns:a16="http://schemas.microsoft.com/office/drawing/2014/main" id="{B269945A-2AD6-6BE9-729F-F0773556A83E}"/>
+              </a:ext>
+            </a:extLst>
+          </p:cNvPr>
+          <p:cNvSpPr txBox="1"/>
+          <p:nvPr/>
+        </p:nvSpPr>
+        <p:spPr>
+          <a:xfrm>
+            <a:off x="4262284" y="6272280"/>
+            <a:ext cx="4572000" cy="307777"/>
+          </a:xfrm>
+          <a:prstGeom prst="rect">
+            <a:avLst/>
+          </a:prstGeom>
+          <a:noFill/>
+        </p:spPr>
+        <p:txBody>
+          <a:bodyPr wrap="square">
+            <a:spAutoFit/>
+          </a:bodyPr>
+          <a:lstStyle/>
+          <a:p>
+            <a:pPr marL="0" marR="0" lvl="0" indent="0" algn="r" rtl="0">
+              <a:lnSpc>
+                <a:spcPct val="100000"/>
+              </a:lnSpc>
+              <a:spcBef>
+                <a:spcPts val="0"/>
+              </a:spcBef>
+              <a:spcAft>
+                <a:spcPts val="0"/>
+              </a:spcAft>
+              <a:buNone/>
+            </a:pPr>
+            <a:r>
+              <a:rPr lang="en-US" b="1" i="0" u="none" strike="noStrike" cap="none" dirty="0">
+                <a:solidFill>
+                  <a:schemeClr val="dk1"/>
+                </a:solidFill>
+                <a:latin typeface="Calibri"/>
+                <a:ea typeface="Calibri"/>
+                <a:cs typeface="Calibri"/>
+                <a:sym typeface="Calibri"/>
+              </a:rPr>
+              <a:t>5</a:t>
+            </a:r>
+            <a:endParaRPr lang="en-US" sz="1400" b="0" i="0" u="none" strike="noStrike" cap="none" dirty="0">
+              <a:solidFill>
+                <a:schemeClr val="dk1"/>
+              </a:solidFill>
+              <a:latin typeface="Times New Roman"/>
+              <a:ea typeface="Times New Roman"/>
+              <a:cs typeface="Times New Roman"/>
+              <a:sym typeface="Times New Roman"/>
             </a:endParaRPr>
           </a:p>
         </p:txBody>
@@ -14433,6 +14867,70 @@
           </a:prstGeom>
         </p:spPr>
       </p:pic>
+      <p:sp>
+        <p:nvSpPr>
+          <p:cNvPr id="4" name="TextBox 3">
+            <a:extLst>
+              <a:ext uri="{FF2B5EF4-FFF2-40B4-BE49-F238E27FC236}">
+                <a16:creationId xmlns:a16="http://schemas.microsoft.com/office/drawing/2014/main" id="{21C1BEB4-1E09-2C06-981B-B4D8DDBB4BBD}"/>
+              </a:ext>
+            </a:extLst>
+          </p:cNvPr>
+          <p:cNvSpPr txBox="1"/>
+          <p:nvPr/>
+        </p:nvSpPr>
+        <p:spPr>
+          <a:xfrm>
+            <a:off x="4252451" y="6407239"/>
+            <a:ext cx="4572000" cy="307777"/>
+          </a:xfrm>
+          <a:prstGeom prst="rect">
+            <a:avLst/>
+          </a:prstGeom>
+          <a:noFill/>
+        </p:spPr>
+        <p:txBody>
+          <a:bodyPr wrap="square">
+            <a:spAutoFit/>
+          </a:bodyPr>
+          <a:lstStyle/>
+          <a:p>
+            <a:pPr marL="0" marR="0" lvl="0" indent="0" algn="r" rtl="0">
+              <a:lnSpc>
+                <a:spcPct val="100000"/>
+              </a:lnSpc>
+              <a:spcBef>
+                <a:spcPts val="0"/>
+              </a:spcBef>
+              <a:spcAft>
+                <a:spcPts val="0"/>
+              </a:spcAft>
+              <a:buNone/>
+            </a:pPr>
+            <a:r>
+              <a:rPr lang="en-US" b="1" i="0" u="none" strike="noStrike" cap="none" dirty="0">
+                <a:solidFill>
+                  <a:schemeClr val="dk1"/>
+                </a:solidFill>
+                <a:latin typeface="Calibri"/>
+                <a:ea typeface="Calibri"/>
+                <a:cs typeface="Calibri"/>
+                <a:sym typeface="Calibri"/>
+              </a:rPr>
+              <a:t>6</a:t>
+            </a:r>
+            <a:endParaRPr lang="en-US" sz="1400" b="0" i="0" u="none" strike="noStrike" cap="none" dirty="0">
+              <a:solidFill>
+                <a:schemeClr val="dk1"/>
+              </a:solidFill>
+              <a:latin typeface="Times New Roman"/>
+              <a:ea typeface="Times New Roman"/>
+              <a:cs typeface="Times New Roman"/>
+              <a:sym typeface="Times New Roman"/>
+            </a:endParaRPr>
+          </a:p>
+        </p:txBody>
+      </p:sp>
     </p:spTree>
     <p:extLst>
       <p:ext uri="{BB962C8B-B14F-4D97-AF65-F5344CB8AC3E}">
@@ -14740,6 +15238,70 @@
             <a:endParaRPr lang="en-IN" sz="1800" dirty="0">
               <a:latin typeface="Times New Roman" panose="02020603050405020304" pitchFamily="18" charset="0"/>
               <a:cs typeface="Times New Roman" panose="02020603050405020304" pitchFamily="18" charset="0"/>
+            </a:endParaRPr>
+          </a:p>
+        </p:txBody>
+      </p:sp>
+      <p:sp>
+        <p:nvSpPr>
+          <p:cNvPr id="5" name="TextBox 4">
+            <a:extLst>
+              <a:ext uri="{FF2B5EF4-FFF2-40B4-BE49-F238E27FC236}">
+                <a16:creationId xmlns:a16="http://schemas.microsoft.com/office/drawing/2014/main" id="{EEF8E64B-8EA7-EBA3-1DBA-B2924F94230C}"/>
+              </a:ext>
+            </a:extLst>
+          </p:cNvPr>
+          <p:cNvSpPr txBox="1"/>
+          <p:nvPr/>
+        </p:nvSpPr>
+        <p:spPr>
+          <a:xfrm>
+            <a:off x="4161503" y="6320654"/>
+            <a:ext cx="4724400" cy="307777"/>
+          </a:xfrm>
+          <a:prstGeom prst="rect">
+            <a:avLst/>
+          </a:prstGeom>
+          <a:noFill/>
+        </p:spPr>
+        <p:txBody>
+          <a:bodyPr wrap="square">
+            <a:spAutoFit/>
+          </a:bodyPr>
+          <a:lstStyle/>
+          <a:p>
+            <a:pPr marL="0" marR="0" lvl="0" indent="0" algn="r" rtl="0">
+              <a:lnSpc>
+                <a:spcPct val="100000"/>
+              </a:lnSpc>
+              <a:spcBef>
+                <a:spcPts val="0"/>
+              </a:spcBef>
+              <a:spcAft>
+                <a:spcPts val="0"/>
+              </a:spcAft>
+              <a:buNone/>
+            </a:pPr>
+            <a:r>
+              <a:rPr lang="en-US" b="1" i="0" u="none" strike="noStrike" cap="none" dirty="0">
+                <a:solidFill>
+                  <a:schemeClr val="dk1"/>
+                </a:solidFill>
+                <a:latin typeface="Calibri"/>
+                <a:ea typeface="Calibri"/>
+                <a:cs typeface="Calibri"/>
+                <a:sym typeface="Calibri"/>
+              </a:rPr>
+              <a:t>7</a:t>
+            </a:r>
+            <a:endParaRPr lang="en-US" sz="1400" b="0" i="0" u="none" strike="noStrike" cap="none" dirty="0">
+              <a:solidFill>
+                <a:schemeClr val="dk1"/>
+              </a:solidFill>
+              <a:latin typeface="Times New Roman"/>
+              <a:ea typeface="Times New Roman"/>
+              <a:cs typeface="Times New Roman"/>
+              <a:sym typeface="Times New Roman"/>
             </a:endParaRPr>
           </a:p>
         </p:txBody>
